--- a/public/documents/business-simulation/round-4/section-d/section-d-round4-universe1-debrief.pptx
+++ b/public/documents/business-simulation/round-4/section-d/section-d-round4-universe1-debrief.pptx
@@ -6620,6 +6620,10 @@
           </p:nvPr>
         </p:nvSpPr>
         <p:spPr/>
+        <p:txBody>
+          <a:bodyPr/>
+          <a:p/>
+        </p:txBody>
       </p:sp>
       <p:sp>
         <p:nvSpPr>
@@ -6636,10 +6640,6 @@
           <a:bodyPr/>
           <a:lstStyle/>
           <a:p>
-            <a:r>
-              <a:rPr lang="en-US" dirty="0"/>
-              <a:t>Open with the core question: what did teams learn between Round 3 and Round 4?</a:t>
-            </a:r>
             <a:endParaRPr lang="en-US" dirty="0"/>
           </a:p>
         </p:txBody>
@@ -6659,10 +6659,6 @@
           <a:bodyPr/>
           <a:lstStyle/>
           <a:p>
-            <a:fld id="{F7021451-1387-4CA6-816F-3879F97B5CBC}" type="slidenum">
-              <a:rPr lang="en-US"/>
-              <a:t>1</a:t>
-            </a:fld>
             <a:endParaRPr lang="en-US"/>
           </a:p>
         </p:txBody>
@@ -6708,6 +6704,10 @@
           </p:nvPr>
         </p:nvSpPr>
         <p:spPr/>
+        <p:txBody>
+          <a:bodyPr/>
+          <a:p/>
+        </p:txBody>
       </p:sp>
       <p:sp>
         <p:nvSpPr>
@@ -6724,10 +6724,6 @@
           <a:bodyPr/>
           <a:lstStyle/>
           <a:p>
-            <a:r>
-              <a:rPr lang="en-US" dirty="0"/>
-              <a:t>Invite teams to state their primary region for Round 5.</a:t>
-            </a:r>
             <a:endParaRPr lang="en-US" dirty="0"/>
           </a:p>
         </p:txBody>
@@ -6747,10 +6743,6 @@
           <a:bodyPr/>
           <a:lstStyle/>
           <a:p>
-            <a:fld id="{F7021451-1387-4CA6-816F-3879F97B5CBC}" type="slidenum">
-              <a:rPr lang="en-US"/>
-              <a:t>10</a:t>
-            </a:fld>
             <a:endParaRPr lang="en-US"/>
           </a:p>
         </p:txBody>
@@ -6796,6 +6788,10 @@
           </p:nvPr>
         </p:nvSpPr>
         <p:spPr/>
+        <p:txBody>
+          <a:bodyPr/>
+          <a:p/>
+        </p:txBody>
       </p:sp>
       <p:sp>
         <p:nvSpPr>
@@ -6812,10 +6808,6 @@
           <a:bodyPr/>
           <a:lstStyle/>
           <a:p>
-            <a:r>
-              <a:rPr lang="en-US" dirty="0"/>
-              <a:t>ROCE is key for technology and production choices.</a:t>
-            </a:r>
             <a:endParaRPr lang="en-US" dirty="0"/>
           </a:p>
         </p:txBody>
@@ -6835,10 +6827,6 @@
           <a:bodyPr/>
           <a:lstStyle/>
           <a:p>
-            <a:fld id="{F7021451-1387-4CA6-816F-3879F97B5CBC}" type="slidenum">
-              <a:rPr lang="en-US"/>
-              <a:t>11</a:t>
-            </a:fld>
             <a:endParaRPr lang="en-US"/>
           </a:p>
         </p:txBody>
@@ -6884,6 +6872,10 @@
           </p:nvPr>
         </p:nvSpPr>
         <p:spPr/>
+        <p:txBody>
+          <a:bodyPr/>
+          <a:p/>
+        </p:txBody>
       </p:sp>
       <p:sp>
         <p:nvSpPr>
@@ -6900,10 +6892,6 @@
           <a:bodyPr/>
           <a:lstStyle/>
           <a:p>
-            <a:r>
-              <a:rPr lang="en-US" dirty="0"/>
-              <a:t>Discuss R&amp;D timing as a disciplined option, not as good or bad by default.</a:t>
-            </a:r>
             <a:endParaRPr lang="en-US" dirty="0"/>
           </a:p>
         </p:txBody>
@@ -6923,10 +6911,6 @@
           <a:bodyPr/>
           <a:lstStyle/>
           <a:p>
-            <a:fld id="{F7021451-1387-4CA6-816F-3879F97B5CBC}" type="slidenum">
-              <a:rPr lang="en-US"/>
-              <a:t>12</a:t>
-            </a:fld>
             <a:endParaRPr lang="en-US"/>
           </a:p>
         </p:txBody>
@@ -6972,6 +6956,10 @@
           </p:nvPr>
         </p:nvSpPr>
         <p:spPr/>
+        <p:txBody>
+          <a:bodyPr/>
+          <a:p/>
+        </p:txBody>
       </p:sp>
       <p:sp>
         <p:nvSpPr>
@@ -6988,10 +6976,6 @@
           <a:bodyPr/>
           <a:lstStyle/>
           <a:p>
-            <a:r>
-              <a:rPr lang="en-US" dirty="0"/>
-              <a:t>Connect inventory to pricing, production and capacity choices.</a:t>
-            </a:r>
             <a:endParaRPr lang="en-US" dirty="0"/>
           </a:p>
         </p:txBody>
@@ -7011,10 +6995,6 @@
           <a:bodyPr/>
           <a:lstStyle/>
           <a:p>
-            <a:fld id="{F7021451-1387-4CA6-816F-3879F97B5CBC}" type="slidenum">
-              <a:rPr lang="en-US"/>
-              <a:t>13</a:t>
-            </a:fld>
             <a:endParaRPr lang="en-US"/>
           </a:p>
         </p:txBody>
@@ -7060,6 +7040,10 @@
           </p:nvPr>
         </p:nvSpPr>
         <p:spPr/>
+        <p:txBody>
+          <a:bodyPr/>
+          <a:p/>
+        </p:txBody>
       </p:sp>
       <p:sp>
         <p:nvSpPr>
@@ -7076,10 +7060,6 @@
           <a:bodyPr/>
           <a:lstStyle/>
           <a:p>
-            <a:r>
-              <a:rPr lang="en-US" dirty="0"/>
-              <a:t>Differentiate planned leverage from unplanned financing pressure.</a:t>
-            </a:r>
             <a:endParaRPr lang="en-US" dirty="0"/>
           </a:p>
         </p:txBody>
@@ -7099,10 +7079,6 @@
           <a:bodyPr/>
           <a:lstStyle/>
           <a:p>
-            <a:fld id="{F7021451-1387-4CA6-816F-3879F97B5CBC}" type="slidenum">
-              <a:rPr lang="en-US"/>
-              <a:t>14</a:t>
-            </a:fld>
             <a:endParaRPr lang="en-US"/>
           </a:p>
         </p:txBody>
@@ -7148,6 +7124,10 @@
           </p:nvPr>
         </p:nvSpPr>
         <p:spPr/>
+        <p:txBody>
+          <a:bodyPr/>
+          <a:p/>
+        </p:txBody>
       </p:sp>
       <p:sp>
         <p:nvSpPr>
@@ -7164,10 +7144,6 @@
           <a:bodyPr/>
           <a:lstStyle/>
           <a:p>
-            <a:r>
-              <a:rPr lang="en-US" dirty="0"/>
-              <a:t>Use only reported ESG metrics; avoid generic claims.</a:t>
-            </a:r>
             <a:endParaRPr lang="en-US" dirty="0"/>
           </a:p>
         </p:txBody>
@@ -7187,10 +7163,6 @@
           <a:bodyPr/>
           <a:lstStyle/>
           <a:p>
-            <a:fld id="{F7021451-1387-4CA6-816F-3879F97B5CBC}" type="slidenum">
-              <a:rPr lang="en-US"/>
-              <a:t>15</a:t>
-            </a:fld>
             <a:endParaRPr lang="en-US"/>
           </a:p>
         </p:txBody>
@@ -7236,6 +7208,10 @@
           </p:nvPr>
         </p:nvSpPr>
         <p:spPr/>
+        <p:txBody>
+          <a:bodyPr/>
+          <a:p/>
+        </p:txBody>
       </p:sp>
       <p:sp>
         <p:nvSpPr>
@@ -7252,10 +7228,6 @@
           <a:bodyPr/>
           <a:lstStyle/>
           <a:p>
-            <a:r>
-              <a:rPr lang="en-US" dirty="0"/>
-              <a:t>Green: discuss rank movement, then separate operating performance from valuation. Ask the team for one evidence-based action rule.</a:t>
-            </a:r>
             <a:endParaRPr lang="en-US" dirty="0"/>
           </a:p>
         </p:txBody>
@@ -7275,10 +7247,6 @@
           <a:bodyPr/>
           <a:lstStyle/>
           <a:p>
-            <a:fld id="{F7021451-1387-4CA6-816F-3879F97B5CBC}" type="slidenum">
-              <a:rPr lang="en-US"/>
-              <a:t>16</a:t>
-            </a:fld>
             <a:endParaRPr lang="en-US"/>
           </a:p>
         </p:txBody>
@@ -7324,6 +7292,10 @@
           </p:nvPr>
         </p:nvSpPr>
         <p:spPr/>
+        <p:txBody>
+          <a:bodyPr/>
+          <a:p/>
+        </p:txBody>
       </p:sp>
       <p:sp>
         <p:nvSpPr>
@@ -7340,10 +7312,6 @@
           <a:bodyPr/>
           <a:lstStyle/>
           <a:p>
-            <a:r>
-              <a:rPr lang="en-US" dirty="0"/>
-              <a:t>Red Rangers: discuss rank movement, then separate operating performance from valuation. Ask the team for one evidence-based action rule.</a:t>
-            </a:r>
             <a:endParaRPr lang="en-US" dirty="0"/>
           </a:p>
         </p:txBody>
@@ -7363,10 +7331,6 @@
           <a:bodyPr/>
           <a:lstStyle/>
           <a:p>
-            <a:fld id="{F7021451-1387-4CA6-816F-3879F97B5CBC}" type="slidenum">
-              <a:rPr lang="en-US"/>
-              <a:t>17</a:t>
-            </a:fld>
             <a:endParaRPr lang="en-US"/>
           </a:p>
         </p:txBody>
@@ -7412,6 +7376,10 @@
           </p:nvPr>
         </p:nvSpPr>
         <p:spPr/>
+        <p:txBody>
+          <a:bodyPr/>
+          <a:p/>
+        </p:txBody>
       </p:sp>
       <p:sp>
         <p:nvSpPr>
@@ -7428,10 +7396,6 @@
           <a:bodyPr/>
           <a:lstStyle/>
           <a:p>
-            <a:r>
-              <a:rPr lang="en-US" dirty="0"/>
-              <a:t>Blue / Chahakars: discuss rank movement, then separate operating performance from valuation. Ask the team for one evidence-based action rule.</a:t>
-            </a:r>
             <a:endParaRPr lang="en-US" dirty="0"/>
           </a:p>
         </p:txBody>
@@ -7451,10 +7415,6 @@
           <a:bodyPr/>
           <a:lstStyle/>
           <a:p>
-            <a:fld id="{F7021451-1387-4CA6-816F-3879F97B5CBC}" type="slidenum">
-              <a:rPr lang="en-US"/>
-              <a:t>18</a:t>
-            </a:fld>
             <a:endParaRPr lang="en-US"/>
           </a:p>
         </p:txBody>
@@ -7500,6 +7460,10 @@
           </p:nvPr>
         </p:nvSpPr>
         <p:spPr/>
+        <p:txBody>
+          <a:bodyPr/>
+          <a:p/>
+        </p:txBody>
       </p:sp>
       <p:sp>
         <p:nvSpPr>
@@ -7516,10 +7480,6 @@
           <a:bodyPr/>
           <a:lstStyle/>
           <a:p>
-            <a:r>
-              <a:rPr lang="en-US" dirty="0"/>
-              <a:t>Orange: discuss rank movement, then separate operating performance from valuation. Ask the team for one evidence-based action rule.</a:t>
-            </a:r>
             <a:endParaRPr lang="en-US" dirty="0"/>
           </a:p>
         </p:txBody>
@@ -7539,10 +7499,6 @@
           <a:bodyPr/>
           <a:lstStyle/>
           <a:p>
-            <a:fld id="{F7021451-1387-4CA6-816F-3879F97B5CBC}" type="slidenum">
-              <a:rPr lang="en-US"/>
-              <a:t>19</a:t>
-            </a:fld>
             <a:endParaRPr lang="en-US"/>
           </a:p>
         </p:txBody>
@@ -7588,6 +7544,10 @@
           </p:nvPr>
         </p:nvSpPr>
         <p:spPr/>
+        <p:txBody>
+          <a:bodyPr/>
+          <a:p/>
+        </p:txBody>
       </p:sp>
       <p:sp>
         <p:nvSpPr>
@@ -7604,10 +7564,6 @@
           <a:bodyPr/>
           <a:lstStyle/>
           <a:p>
-            <a:r>
-              <a:rPr lang="en-US" dirty="0"/>
-              <a:t>Clarify that labels changed in some exports. Use canonical identities for comparison.</a:t>
-            </a:r>
             <a:endParaRPr lang="en-US" dirty="0"/>
           </a:p>
         </p:txBody>
@@ -7627,10 +7583,6 @@
           <a:bodyPr/>
           <a:lstStyle/>
           <a:p>
-            <a:fld id="{F7021451-1387-4CA6-816F-3879F97B5CBC}" type="slidenum">
-              <a:rPr lang="en-US"/>
-              <a:t>2</a:t>
-            </a:fld>
             <a:endParaRPr lang="en-US"/>
           </a:p>
         </p:txBody>
@@ -7676,6 +7628,10 @@
           </p:nvPr>
         </p:nvSpPr>
         <p:spPr/>
+        <p:txBody>
+          <a:bodyPr/>
+          <a:p/>
+        </p:txBody>
       </p:sp>
       <p:sp>
         <p:nvSpPr>
@@ -7692,10 +7648,6 @@
           <a:bodyPr/>
           <a:lstStyle/>
           <a:p>
-            <a:r>
-              <a:rPr lang="en-US" dirty="0"/>
-              <a:t>Grey: discuss rank movement, then separate operating performance from valuation. Ask the team for one evidence-based action rule.</a:t>
-            </a:r>
             <a:endParaRPr lang="en-US" dirty="0"/>
           </a:p>
         </p:txBody>
@@ -7715,10 +7667,6 @@
           <a:bodyPr/>
           <a:lstStyle/>
           <a:p>
-            <a:fld id="{F7021451-1387-4CA6-816F-3879F97B5CBC}" type="slidenum">
-              <a:rPr lang="en-US"/>
-              <a:t>20</a:t>
-            </a:fld>
             <a:endParaRPr lang="en-US"/>
           </a:p>
         </p:txBody>
@@ -7764,6 +7712,10 @@
           </p:nvPr>
         </p:nvSpPr>
         <p:spPr/>
+        <p:txBody>
+          <a:bodyPr/>
+          <a:p/>
+        </p:txBody>
       </p:sp>
       <p:sp>
         <p:nvSpPr>
@@ -7780,10 +7732,6 @@
           <a:bodyPr/>
           <a:lstStyle/>
           <a:p>
-            <a:r>
-              <a:rPr lang="en-US" dirty="0"/>
-              <a:t>Ochre: discuss rank movement, then separate operating performance from valuation. Ask the team for one evidence-based action rule.</a:t>
-            </a:r>
             <a:endParaRPr lang="en-US" dirty="0"/>
           </a:p>
         </p:txBody>
@@ -7803,10 +7751,6 @@
           <a:bodyPr/>
           <a:lstStyle/>
           <a:p>
-            <a:fld id="{F7021451-1387-4CA6-816F-3879F97B5CBC}" type="slidenum">
-              <a:rPr lang="en-US"/>
-              <a:t>21</a:t>
-            </a:fld>
             <a:endParaRPr lang="en-US"/>
           </a:p>
         </p:txBody>
@@ -7852,6 +7796,10 @@
           </p:nvPr>
         </p:nvSpPr>
         <p:spPr/>
+        <p:txBody>
+          <a:bodyPr/>
+          <a:p/>
+        </p:txBody>
       </p:sp>
       <p:sp>
         <p:nvSpPr>
@@ -7868,10 +7816,6 @@
           <a:bodyPr/>
           <a:lstStyle/>
           <a:p>
-            <a:r>
-              <a:rPr lang="en-US" dirty="0"/>
-              <a:t>Ask each team to identify one reward pattern they earned.</a:t>
-            </a:r>
             <a:endParaRPr lang="en-US" dirty="0"/>
           </a:p>
         </p:txBody>
@@ -7891,10 +7835,6 @@
           <a:bodyPr/>
           <a:lstStyle/>
           <a:p>
-            <a:fld id="{F7021451-1387-4CA6-816F-3879F97B5CBC}" type="slidenum">
-              <a:rPr lang="en-US"/>
-              <a:t>22</a:t>
-            </a:fld>
             <a:endParaRPr lang="en-US"/>
           </a:p>
         </p:txBody>
@@ -7940,6 +7880,10 @@
           </p:nvPr>
         </p:nvSpPr>
         <p:spPr/>
+        <p:txBody>
+          <a:bodyPr/>
+          <a:p/>
+        </p:txBody>
       </p:sp>
       <p:sp>
         <p:nvSpPr>
@@ -7956,10 +7900,6 @@
           <a:bodyPr/>
           <a:lstStyle/>
           <a:p>
-            <a:r>
-              <a:rPr lang="en-US" dirty="0"/>
-              <a:t>Keep language constructive for weak teams.</a:t>
-            </a:r>
             <a:endParaRPr lang="en-US" dirty="0"/>
           </a:p>
         </p:txBody>
@@ -7979,10 +7919,6 @@
           <a:bodyPr/>
           <a:lstStyle/>
           <a:p>
-            <a:fld id="{F7021451-1387-4CA6-816F-3879F97B5CBC}" type="slidenum">
-              <a:rPr lang="en-US"/>
-              <a:t>23</a:t>
-            </a:fld>
             <a:endParaRPr lang="en-US"/>
           </a:p>
         </p:txBody>
@@ -8028,6 +7964,10 @@
           </p:nvPr>
         </p:nvSpPr>
         <p:spPr/>
+        <p:txBody>
+          <a:bodyPr/>
+          <a:p/>
+        </p:txBody>
       </p:sp>
       <p:sp>
         <p:nvSpPr>
@@ -8044,10 +7984,6 @@
           <a:bodyPr/>
           <a:lstStyle/>
           <a:p>
-            <a:r>
-              <a:rPr lang="en-US" dirty="0"/>
-              <a:t>End with each team stating one hypothesis, one falsifying metric and one guardrail.</a:t>
-            </a:r>
             <a:endParaRPr lang="en-US" dirty="0"/>
           </a:p>
         </p:txBody>
@@ -8067,10 +8003,6 @@
           <a:bodyPr/>
           <a:lstStyle/>
           <a:p>
-            <a:fld id="{F7021451-1387-4CA6-816F-3879F97B5CBC}" type="slidenum">
-              <a:rPr lang="en-US"/>
-              <a:t>24</a:t>
-            </a:fld>
             <a:endParaRPr lang="en-US"/>
           </a:p>
         </p:txBody>
@@ -8116,6 +8048,10 @@
           </p:nvPr>
         </p:nvSpPr>
         <p:spPr/>
+        <p:txBody>
+          <a:bodyPr/>
+          <a:p/>
+        </p:txBody>
       </p:sp>
       <p:sp>
         <p:nvSpPr>
@@ -8132,10 +8068,6 @@
           <a:bodyPr/>
           <a:lstStyle/>
           <a:p>
-            <a:r>
-              <a:rPr lang="en-US" dirty="0"/>
-              <a:t>Close with one commitment per team.</a:t>
-            </a:r>
             <a:endParaRPr lang="en-US" dirty="0"/>
           </a:p>
         </p:txBody>
@@ -8155,10 +8087,6 @@
           <a:bodyPr/>
           <a:lstStyle/>
           <a:p>
-            <a:fld id="{F7021451-1387-4CA6-816F-3879F97B5CBC}" type="slidenum">
-              <a:rPr lang="en-US"/>
-              <a:t>25</a:t>
-            </a:fld>
             <a:endParaRPr lang="en-US"/>
           </a:p>
         </p:txBody>
@@ -8204,6 +8132,10 @@
           </p:nvPr>
         </p:nvSpPr>
         <p:spPr/>
+        <p:txBody>
+          <a:bodyPr/>
+          <a:p/>
+        </p:txBody>
       </p:sp>
       <p:sp>
         <p:nvSpPr>
@@ -8220,10 +8152,6 @@
           <a:bodyPr/>
           <a:lstStyle/>
           <a:p>
-            <a:r>
-              <a:rPr lang="en-US" dirty="0"/>
-              <a:t>Use this slide to discipline class discussion before moving to results.</a:t>
-            </a:r>
             <a:endParaRPr lang="en-US" dirty="0"/>
           </a:p>
         </p:txBody>
@@ -8243,10 +8171,6 @@
           <a:bodyPr/>
           <a:lstStyle/>
           <a:p>
-            <a:fld id="{F7021451-1387-4CA6-816F-3879F97B5CBC}" type="slidenum">
-              <a:rPr lang="en-US"/>
-              <a:t>3</a:t>
-            </a:fld>
             <a:endParaRPr lang="en-US"/>
           </a:p>
         </p:txBody>
@@ -8292,6 +8216,10 @@
           </p:nvPr>
         </p:nvSpPr>
         <p:spPr/>
+        <p:txBody>
+          <a:bodyPr/>
+          <a:p/>
+        </p:txBody>
       </p:sp>
       <p:sp>
         <p:nvSpPr>
@@ -8308,10 +8236,6 @@
           <a:bodyPr/>
           <a:lstStyle/>
           <a:p>
-            <a:r>
-              <a:rPr lang="en-US" dirty="0"/>
-              <a:t>Ask students to identify what ranking does and does not reveal.</a:t>
-            </a:r>
             <a:endParaRPr lang="en-US" dirty="0"/>
           </a:p>
         </p:txBody>
@@ -8331,10 +8255,6 @@
           <a:bodyPr/>
           <a:lstStyle/>
           <a:p>
-            <a:fld id="{F7021451-1387-4CA6-816F-3879F97B5CBC}" type="slidenum">
-              <a:rPr lang="en-US"/>
-              <a:t>4</a:t>
-            </a:fld>
             <a:endParaRPr lang="en-US"/>
           </a:p>
         </p:txBody>
@@ -8380,6 +8300,10 @@
           </p:nvPr>
         </p:nvSpPr>
         <p:spPr/>
+        <p:txBody>
+          <a:bodyPr/>
+          <a:p/>
+        </p:txBody>
       </p:sp>
       <p:sp>
         <p:nvSpPr>
@@ -8396,10 +8320,6 @@
           <a:bodyPr/>
           <a:lstStyle/>
           <a:p>
-            <a:r>
-              <a:rPr lang="en-US" dirty="0"/>
-              <a:t>Spend time on rank movement. It prevents static scoreboard thinking.</a:t>
-            </a:r>
             <a:endParaRPr lang="en-US" dirty="0"/>
           </a:p>
         </p:txBody>
@@ -8419,10 +8339,6 @@
           <a:bodyPr/>
           <a:lstStyle/>
           <a:p>
-            <a:fld id="{F7021451-1387-4CA6-816F-3879F97B5CBC}" type="slidenum">
-              <a:rPr lang="en-US"/>
-              <a:t>5</a:t>
-            </a:fld>
             <a:endParaRPr lang="en-US"/>
           </a:p>
         </p:txBody>
@@ -8468,6 +8384,10 @@
           </p:nvPr>
         </p:nvSpPr>
         <p:spPr/>
+        <p:txBody>
+          <a:bodyPr/>
+          <a:p/>
+        </p:txBody>
       </p:sp>
       <p:sp>
         <p:nvSpPr>
@@ -8484,10 +8404,6 @@
           <a:bodyPr/>
           <a:lstStyle/>
           <a:p>
-            <a:r>
-              <a:rPr lang="en-US" dirty="0"/>
-              <a:t>Lead students from aggregate movement into team-level drivers.</a:t>
-            </a:r>
             <a:endParaRPr lang="en-US" dirty="0"/>
           </a:p>
         </p:txBody>
@@ -8507,10 +8423,6 @@
           <a:bodyPr/>
           <a:lstStyle/>
           <a:p>
-            <a:fld id="{F7021451-1387-4CA6-816F-3879F97B5CBC}" type="slidenum">
-              <a:rPr lang="en-US"/>
-              <a:t>6</a:t>
-            </a:fld>
             <a:endParaRPr lang="en-US"/>
           </a:p>
         </p:txBody>
@@ -8556,6 +8468,10 @@
           </p:nvPr>
         </p:nvSpPr>
         <p:spPr/>
+        <p:txBody>
+          <a:bodyPr/>
+          <a:p/>
+        </p:txBody>
       </p:sp>
       <p:sp>
         <p:nvSpPr>
@@ -8572,10 +8488,6 @@
           <a:bodyPr/>
           <a:lstStyle/>
           <a:p>
-            <a:r>
-              <a:rPr lang="en-US" dirty="0"/>
-              <a:t>Use this as the central puzzle.</a:t>
-            </a:r>
             <a:endParaRPr lang="en-US" dirty="0"/>
           </a:p>
         </p:txBody>
@@ -8595,10 +8507,6 @@
           <a:bodyPr/>
           <a:lstStyle/>
           <a:p>
-            <a:fld id="{F7021451-1387-4CA6-816F-3879F97B5CBC}" type="slidenum">
-              <a:rPr lang="en-US"/>
-              <a:t>7</a:t>
-            </a:fld>
             <a:endParaRPr lang="en-US"/>
           </a:p>
         </p:txBody>
@@ -8644,6 +8552,10 @@
           </p:nvPr>
         </p:nvSpPr>
         <p:spPr/>
+        <p:txBody>
+          <a:bodyPr/>
+          <a:p/>
+        </p:txBody>
       </p:sp>
       <p:sp>
         <p:nvSpPr>
@@ -8660,10 +8572,6 @@
           <a:bodyPr/>
           <a:lstStyle/>
           <a:p>
-            <a:r>
-              <a:rPr lang="en-US" dirty="0"/>
-              <a:t>Ask what caused sales movement: price, volume, technology mix or regional mix.</a:t>
-            </a:r>
             <a:endParaRPr lang="en-US" dirty="0"/>
           </a:p>
         </p:txBody>
@@ -8683,10 +8591,6 @@
           <a:bodyPr/>
           <a:lstStyle/>
           <a:p>
-            <a:fld id="{F7021451-1387-4CA6-816F-3879F97B5CBC}" type="slidenum">
-              <a:rPr lang="en-US"/>
-              <a:t>8</a:t>
-            </a:fld>
             <a:endParaRPr lang="en-US"/>
           </a:p>
         </p:txBody>
@@ -8732,6 +8636,10 @@
           </p:nvPr>
         </p:nvSpPr>
         <p:spPr/>
+        <p:txBody>
+          <a:bodyPr/>
+          <a:p/>
+        </p:txBody>
       </p:sp>
       <p:sp>
         <p:nvSpPr>
@@ -8748,10 +8656,6 @@
           <a:bodyPr/>
           <a:lstStyle/>
           <a:p>
-            <a:r>
-              <a:rPr lang="en-US" dirty="0"/>
-              <a:t>Separate operating improvements from one-off reductions in investment spending.</a:t>
-            </a:r>
             <a:endParaRPr lang="en-US" dirty="0"/>
           </a:p>
         </p:txBody>
@@ -8771,10 +8675,6 @@
           <a:bodyPr/>
           <a:lstStyle/>
           <a:p>
-            <a:fld id="{F7021451-1387-4CA6-816F-3879F97B5CBC}" type="slidenum">
-              <a:rPr lang="en-US"/>
-              <a:t>9</a:t>
-            </a:fld>
             <a:endParaRPr lang="en-US"/>
           </a:p>
         </p:txBody>
@@ -9147,6 +9047,10 @@
             <a:prstDash val="solid"/>
           </a:ln>
         </p:spPr>
+        <p:txBody>
+          <a:bodyPr/>
+          <a:p/>
+        </p:txBody>
       </p:sp>
       <p:sp>
         <p:nvSpPr>
@@ -9291,6 +9195,10 @@
             <a:prstDash val="solid"/>
           </a:ln>
         </p:spPr>
+        <p:txBody>
+          <a:bodyPr/>
+          <a:p/>
+        </p:txBody>
       </p:sp>
       <p:sp>
         <p:nvSpPr>
@@ -9398,6 +9306,10 @@
             <a:prstDash val="solid"/>
           </a:ln>
         </p:spPr>
+        <p:txBody>
+          <a:bodyPr/>
+          <a:p/>
+        </p:txBody>
       </p:sp>
       <p:sp>
         <p:nvSpPr>
@@ -9425,6 +9337,10 @@
             <a:prstDash val="solid"/>
           </a:ln>
         </p:spPr>
+        <p:txBody>
+          <a:bodyPr/>
+          <a:p/>
+        </p:txBody>
       </p:sp>
       <p:sp>
         <p:nvSpPr>
@@ -9491,6 +9407,10 @@
             <a:prstDash val="solid"/>
           </a:ln>
         </p:spPr>
+        <p:txBody>
+          <a:bodyPr/>
+          <a:p/>
+        </p:txBody>
       </p:sp>
       <p:sp>
         <p:nvSpPr>
@@ -9557,6 +9477,10 @@
             <a:prstDash val="solid"/>
           </a:ln>
         </p:spPr>
+        <p:txBody>
+          <a:bodyPr/>
+          <a:p/>
+        </p:txBody>
       </p:sp>
       <p:sp>
         <p:nvSpPr>
@@ -9623,6 +9547,10 @@
             <a:prstDash val="solid"/>
           </a:ln>
         </p:spPr>
+        <p:txBody>
+          <a:bodyPr/>
+          <a:p/>
+        </p:txBody>
       </p:sp>
       <p:sp>
         <p:nvSpPr>
@@ -9689,6 +9617,10 @@
             <a:prstDash val="solid"/>
           </a:ln>
         </p:spPr>
+        <p:txBody>
+          <a:bodyPr/>
+          <a:p/>
+        </p:txBody>
       </p:sp>
       <p:sp>
         <p:nvSpPr>
@@ -9755,6 +9687,10 @@
             <a:prstDash val="solid"/>
           </a:ln>
         </p:spPr>
+        <p:txBody>
+          <a:bodyPr/>
+          <a:p/>
+        </p:txBody>
       </p:sp>
       <p:sp>
         <p:nvSpPr>
@@ -9890,6 +9826,10 @@
             <a:prstDash val="solid"/>
           </a:ln>
         </p:spPr>
+        <p:txBody>
+          <a:bodyPr/>
+          <a:p/>
+        </p:txBody>
       </p:sp>
       <p:sp>
         <p:nvSpPr>
@@ -9991,6 +9931,10 @@
             <a:prstDash val="solid"/>
           </a:ln>
         </p:spPr>
+        <p:txBody>
+          <a:bodyPr/>
+          <a:p/>
+        </p:txBody>
       </p:sp>
       <p:sp>
         <p:nvSpPr>
@@ -10151,6 +10095,10 @@
             <a:prstDash val="solid"/>
           </a:ln>
         </p:spPr>
+        <p:txBody>
+          <a:bodyPr/>
+          <a:p/>
+        </p:txBody>
       </p:sp>
       <p:sp>
         <p:nvSpPr>
@@ -10365,6 +10313,10 @@
             <a:prstDash val="solid"/>
           </a:ln>
         </p:spPr>
+        <p:txBody>
+          <a:bodyPr/>
+          <a:p/>
+        </p:txBody>
       </p:sp>
       <p:sp>
         <p:nvSpPr>
@@ -10599,6 +10551,10 @@
             <a:prstDash val="solid"/>
           </a:ln>
         </p:spPr>
+        <p:txBody>
+          <a:bodyPr/>
+          <a:p/>
+        </p:txBody>
       </p:sp>
       <p:sp>
         <p:nvSpPr>
@@ -10700,6 +10656,10 @@
             <a:prstDash val="solid"/>
           </a:ln>
         </p:spPr>
+        <p:txBody>
+          <a:bodyPr/>
+          <a:p/>
+        </p:txBody>
       </p:sp>
       <p:sp>
         <p:nvSpPr>
@@ -10926,6 +10886,10 @@
             <a:prstDash val="solid"/>
           </a:ln>
         </p:spPr>
+        <p:txBody>
+          <a:bodyPr/>
+          <a:p/>
+        </p:txBody>
       </p:sp>
       <p:sp>
         <p:nvSpPr>
@@ -11160,6 +11124,10 @@
             <a:prstDash val="solid"/>
           </a:ln>
         </p:spPr>
+        <p:txBody>
+          <a:bodyPr/>
+          <a:p/>
+        </p:txBody>
       </p:sp>
       <p:sp>
         <p:nvSpPr>
@@ -11261,6 +11229,10 @@
             <a:prstDash val="solid"/>
           </a:ln>
         </p:spPr>
+        <p:txBody>
+          <a:bodyPr/>
+          <a:p/>
+        </p:txBody>
       </p:sp>
       <p:sp>
         <p:nvSpPr>
@@ -11487,6 +11459,10 @@
             <a:prstDash val="solid"/>
           </a:ln>
         </p:spPr>
+        <p:txBody>
+          <a:bodyPr/>
+          <a:p/>
+        </p:txBody>
       </p:sp>
       <p:sp>
         <p:nvSpPr>
@@ -11721,6 +11697,10 @@
             <a:prstDash val="solid"/>
           </a:ln>
         </p:spPr>
+        <p:txBody>
+          <a:bodyPr/>
+          <a:p/>
+        </p:txBody>
       </p:sp>
       <p:sp>
         <p:nvSpPr>
@@ -11822,6 +11802,10 @@
             <a:prstDash val="solid"/>
           </a:ln>
         </p:spPr>
+        <p:txBody>
+          <a:bodyPr/>
+          <a:p/>
+        </p:txBody>
       </p:sp>
       <p:sp>
         <p:nvSpPr>
@@ -12048,6 +12032,10 @@
             <a:prstDash val="solid"/>
           </a:ln>
         </p:spPr>
+        <p:txBody>
+          <a:bodyPr/>
+          <a:p/>
+        </p:txBody>
       </p:sp>
       <p:sp>
         <p:nvSpPr>
@@ -12282,6 +12270,10 @@
             <a:prstDash val="solid"/>
           </a:ln>
         </p:spPr>
+        <p:txBody>
+          <a:bodyPr/>
+          <a:p/>
+        </p:txBody>
       </p:sp>
       <p:sp>
         <p:nvSpPr>
@@ -12383,6 +12375,10 @@
             <a:prstDash val="solid"/>
           </a:ln>
         </p:spPr>
+        <p:txBody>
+          <a:bodyPr/>
+          <a:p/>
+        </p:txBody>
       </p:sp>
       <p:sp>
         <p:nvSpPr>
@@ -15447,6 +15443,10 @@
             <a:prstDash val="solid"/>
           </a:ln>
         </p:spPr>
+        <p:txBody>
+          <a:bodyPr/>
+          <a:p/>
+        </p:txBody>
       </p:sp>
       <p:sp>
         <p:nvSpPr>
@@ -15681,6 +15681,10 @@
             <a:prstDash val="solid"/>
           </a:ln>
         </p:spPr>
+        <p:txBody>
+          <a:bodyPr/>
+          <a:p/>
+        </p:txBody>
       </p:sp>
       <p:sp>
         <p:nvSpPr>
@@ -15782,6 +15786,10 @@
             <a:prstDash val="solid"/>
           </a:ln>
         </p:spPr>
+        <p:txBody>
+          <a:bodyPr/>
+          <a:p/>
+        </p:txBody>
       </p:sp>
       <p:sp>
         <p:nvSpPr>
@@ -16008,6 +16016,10 @@
             <a:prstDash val="solid"/>
           </a:ln>
         </p:spPr>
+        <p:txBody>
+          <a:bodyPr/>
+          <a:p/>
+        </p:txBody>
       </p:sp>
       <p:sp>
         <p:nvSpPr>
@@ -16242,6 +16254,10 @@
             <a:prstDash val="solid"/>
           </a:ln>
         </p:spPr>
+        <p:txBody>
+          <a:bodyPr/>
+          <a:p/>
+        </p:txBody>
       </p:sp>
       <p:sp>
         <p:nvSpPr>
@@ -16343,6 +16359,10 @@
             <a:prstDash val="solid"/>
           </a:ln>
         </p:spPr>
+        <p:txBody>
+          <a:bodyPr/>
+          <a:p/>
+        </p:txBody>
       </p:sp>
       <p:sp>
         <p:nvSpPr>
@@ -16448,6 +16468,10 @@
             <a:prstDash val="solid"/>
           </a:ln>
         </p:spPr>
+        <p:txBody>
+          <a:bodyPr/>
+          <a:p/>
+        </p:txBody>
       </p:sp>
       <p:sp>
         <p:nvSpPr>
@@ -16596,6 +16620,10 @@
             <a:prstDash val="solid"/>
           </a:ln>
         </p:spPr>
+        <p:txBody>
+          <a:bodyPr/>
+          <a:p/>
+        </p:txBody>
       </p:sp>
       <p:sp>
         <p:nvSpPr>
@@ -16744,6 +16772,10 @@
             <a:prstDash val="solid"/>
           </a:ln>
         </p:spPr>
+        <p:txBody>
+          <a:bodyPr/>
+          <a:p/>
+        </p:txBody>
       </p:sp>
       <p:sp>
         <p:nvSpPr>
@@ -16892,6 +16924,10 @@
             <a:prstDash val="solid"/>
           </a:ln>
         </p:spPr>
+        <p:txBody>
+          <a:bodyPr/>
+          <a:p/>
+        </p:txBody>
       </p:sp>
       <p:sp>
         <p:nvSpPr>
@@ -17040,6 +17076,10 @@
             <a:prstDash val="solid"/>
           </a:ln>
         </p:spPr>
+        <p:txBody>
+          <a:bodyPr/>
+          <a:p/>
+        </p:txBody>
       </p:sp>
       <p:sp>
         <p:nvSpPr>
@@ -17188,6 +17228,10 @@
             <a:prstDash val="solid"/>
           </a:ln>
         </p:spPr>
+        <p:txBody>
+          <a:bodyPr/>
+          <a:p/>
+        </p:txBody>
       </p:sp>
       <p:sp>
         <p:nvSpPr>
@@ -17471,6 +17515,10 @@
             <a:prstDash val="solid"/>
           </a:ln>
         </p:spPr>
+        <p:txBody>
+          <a:bodyPr/>
+          <a:p/>
+        </p:txBody>
       </p:sp>
       <p:sp>
         <p:nvSpPr>
@@ -17705,6 +17753,10 @@
             <a:prstDash val="solid"/>
           </a:ln>
         </p:spPr>
+        <p:txBody>
+          <a:bodyPr/>
+          <a:p/>
+        </p:txBody>
       </p:sp>
       <p:sp>
         <p:nvSpPr>
@@ -17806,6 +17858,10 @@
             <a:prstDash val="solid"/>
           </a:ln>
         </p:spPr>
+        <p:txBody>
+          <a:bodyPr/>
+          <a:p/>
+        </p:txBody>
       </p:sp>
       <p:sp>
         <p:nvSpPr>
@@ -17911,6 +17967,10 @@
             <a:prstDash val="solid"/>
           </a:ln>
         </p:spPr>
+        <p:txBody>
+          <a:bodyPr/>
+          <a:p/>
+        </p:txBody>
       </p:sp>
       <p:sp>
         <p:nvSpPr>
@@ -18059,6 +18119,10 @@
             <a:prstDash val="solid"/>
           </a:ln>
         </p:spPr>
+        <p:txBody>
+          <a:bodyPr/>
+          <a:p/>
+        </p:txBody>
       </p:sp>
       <p:sp>
         <p:nvSpPr>
@@ -18207,6 +18271,10 @@
             <a:prstDash val="solid"/>
           </a:ln>
         </p:spPr>
+        <p:txBody>
+          <a:bodyPr/>
+          <a:p/>
+        </p:txBody>
       </p:sp>
       <p:sp>
         <p:nvSpPr>
@@ -18355,6 +18423,10 @@
             <a:prstDash val="solid"/>
           </a:ln>
         </p:spPr>
+        <p:txBody>
+          <a:bodyPr/>
+          <a:p/>
+        </p:txBody>
       </p:sp>
       <p:sp>
         <p:nvSpPr>
@@ -18503,6 +18575,10 @@
             <a:prstDash val="solid"/>
           </a:ln>
         </p:spPr>
+        <p:txBody>
+          <a:bodyPr/>
+          <a:p/>
+        </p:txBody>
       </p:sp>
       <p:sp>
         <p:nvSpPr>
@@ -18651,6 +18727,10 @@
             <a:prstDash val="solid"/>
           </a:ln>
         </p:spPr>
+        <p:txBody>
+          <a:bodyPr/>
+          <a:p/>
+        </p:txBody>
       </p:sp>
       <p:sp>
         <p:nvSpPr>
@@ -18934,6 +19014,10 @@
             <a:prstDash val="solid"/>
           </a:ln>
         </p:spPr>
+        <p:txBody>
+          <a:bodyPr/>
+          <a:p/>
+        </p:txBody>
       </p:sp>
       <p:sp>
         <p:nvSpPr>
@@ -19168,6 +19252,10 @@
             <a:prstDash val="solid"/>
           </a:ln>
         </p:spPr>
+        <p:txBody>
+          <a:bodyPr/>
+          <a:p/>
+        </p:txBody>
       </p:sp>
       <p:sp>
         <p:nvSpPr>
@@ -19269,6 +19357,10 @@
             <a:prstDash val="solid"/>
           </a:ln>
         </p:spPr>
+        <p:txBody>
+          <a:bodyPr/>
+          <a:p/>
+        </p:txBody>
       </p:sp>
       <p:sp>
         <p:nvSpPr>
@@ -19374,6 +19466,10 @@
             <a:prstDash val="solid"/>
           </a:ln>
         </p:spPr>
+        <p:txBody>
+          <a:bodyPr/>
+          <a:p/>
+        </p:txBody>
       </p:sp>
       <p:sp>
         <p:nvSpPr>
@@ -19522,6 +19618,10 @@
             <a:prstDash val="solid"/>
           </a:ln>
         </p:spPr>
+        <p:txBody>
+          <a:bodyPr/>
+          <a:p/>
+        </p:txBody>
       </p:sp>
       <p:sp>
         <p:nvSpPr>
@@ -19670,6 +19770,10 @@
             <a:prstDash val="solid"/>
           </a:ln>
         </p:spPr>
+        <p:txBody>
+          <a:bodyPr/>
+          <a:p/>
+        </p:txBody>
       </p:sp>
       <p:sp>
         <p:nvSpPr>
@@ -19818,6 +19922,10 @@
             <a:prstDash val="solid"/>
           </a:ln>
         </p:spPr>
+        <p:txBody>
+          <a:bodyPr/>
+          <a:p/>
+        </p:txBody>
       </p:sp>
       <p:sp>
         <p:nvSpPr>
@@ -19966,6 +20074,10 @@
             <a:prstDash val="solid"/>
           </a:ln>
         </p:spPr>
+        <p:txBody>
+          <a:bodyPr/>
+          <a:p/>
+        </p:txBody>
       </p:sp>
       <p:sp>
         <p:nvSpPr>
@@ -20114,6 +20226,10 @@
             <a:prstDash val="solid"/>
           </a:ln>
         </p:spPr>
+        <p:txBody>
+          <a:bodyPr/>
+          <a:p/>
+        </p:txBody>
       </p:sp>
       <p:sp>
         <p:nvSpPr>
@@ -20397,6 +20513,10 @@
             <a:prstDash val="solid"/>
           </a:ln>
         </p:spPr>
+        <p:txBody>
+          <a:bodyPr/>
+          <a:p/>
+        </p:txBody>
       </p:sp>
       <p:sp>
         <p:nvSpPr>
@@ -20631,6 +20751,10 @@
             <a:prstDash val="solid"/>
           </a:ln>
         </p:spPr>
+        <p:txBody>
+          <a:bodyPr/>
+          <a:p/>
+        </p:txBody>
       </p:sp>
       <p:sp>
         <p:nvSpPr>
@@ -20732,6 +20856,10 @@
             <a:prstDash val="solid"/>
           </a:ln>
         </p:spPr>
+        <p:txBody>
+          <a:bodyPr/>
+          <a:p/>
+        </p:txBody>
       </p:sp>
       <p:sp>
         <p:nvSpPr>
@@ -20837,6 +20965,10 @@
             <a:prstDash val="solid"/>
           </a:ln>
         </p:spPr>
+        <p:txBody>
+          <a:bodyPr/>
+          <a:p/>
+        </p:txBody>
       </p:sp>
       <p:sp>
         <p:nvSpPr>
@@ -20985,6 +21117,10 @@
             <a:prstDash val="solid"/>
           </a:ln>
         </p:spPr>
+        <p:txBody>
+          <a:bodyPr/>
+          <a:p/>
+        </p:txBody>
       </p:sp>
       <p:sp>
         <p:nvSpPr>
@@ -21133,6 +21269,10 @@
             <a:prstDash val="solid"/>
           </a:ln>
         </p:spPr>
+        <p:txBody>
+          <a:bodyPr/>
+          <a:p/>
+        </p:txBody>
       </p:sp>
       <p:sp>
         <p:nvSpPr>
@@ -21281,6 +21421,10 @@
             <a:prstDash val="solid"/>
           </a:ln>
         </p:spPr>
+        <p:txBody>
+          <a:bodyPr/>
+          <a:p/>
+        </p:txBody>
       </p:sp>
       <p:sp>
         <p:nvSpPr>
@@ -21429,6 +21573,10 @@
             <a:prstDash val="solid"/>
           </a:ln>
         </p:spPr>
+        <p:txBody>
+          <a:bodyPr/>
+          <a:p/>
+        </p:txBody>
       </p:sp>
       <p:sp>
         <p:nvSpPr>
@@ -21577,6 +21725,10 @@
             <a:prstDash val="solid"/>
           </a:ln>
         </p:spPr>
+        <p:txBody>
+          <a:bodyPr/>
+          <a:p/>
+        </p:txBody>
       </p:sp>
       <p:sp>
         <p:nvSpPr>
@@ -21860,6 +22012,10 @@
             <a:prstDash val="solid"/>
           </a:ln>
         </p:spPr>
+        <p:txBody>
+          <a:bodyPr/>
+          <a:p/>
+        </p:txBody>
       </p:sp>
       <p:sp>
         <p:nvSpPr>
@@ -22094,6 +22250,10 @@
             <a:prstDash val="solid"/>
           </a:ln>
         </p:spPr>
+        <p:txBody>
+          <a:bodyPr/>
+          <a:p/>
+        </p:txBody>
       </p:sp>
       <p:sp>
         <p:nvSpPr>
@@ -22195,6 +22355,10 @@
             <a:prstDash val="solid"/>
           </a:ln>
         </p:spPr>
+        <p:txBody>
+          <a:bodyPr/>
+          <a:p/>
+        </p:txBody>
       </p:sp>
       <p:sp>
         <p:nvSpPr>
@@ -24793,6 +24957,10 @@
             <a:prstDash val="solid"/>
           </a:ln>
         </p:spPr>
+        <p:txBody>
+          <a:bodyPr/>
+          <a:p/>
+        </p:txBody>
       </p:sp>
       <p:sp>
         <p:nvSpPr>
@@ -25027,6 +25195,10 @@
             <a:prstDash val="solid"/>
           </a:ln>
         </p:spPr>
+        <p:txBody>
+          <a:bodyPr/>
+          <a:p/>
+        </p:txBody>
       </p:sp>
       <p:sp>
         <p:nvSpPr>
@@ -25128,6 +25300,10 @@
             <a:prstDash val="solid"/>
           </a:ln>
         </p:spPr>
+        <p:txBody>
+          <a:bodyPr/>
+          <a:p/>
+        </p:txBody>
       </p:sp>
       <p:sp>
         <p:nvSpPr>
@@ -25233,6 +25409,10 @@
             <a:prstDash val="solid"/>
           </a:ln>
         </p:spPr>
+        <p:txBody>
+          <a:bodyPr/>
+          <a:p/>
+        </p:txBody>
       </p:sp>
       <p:sp>
         <p:nvSpPr>
@@ -25381,6 +25561,10 @@
             <a:prstDash val="solid"/>
           </a:ln>
         </p:spPr>
+        <p:txBody>
+          <a:bodyPr/>
+          <a:p/>
+        </p:txBody>
       </p:sp>
       <p:sp>
         <p:nvSpPr>
@@ -25529,6 +25713,10 @@
             <a:prstDash val="solid"/>
           </a:ln>
         </p:spPr>
+        <p:txBody>
+          <a:bodyPr/>
+          <a:p/>
+        </p:txBody>
       </p:sp>
       <p:sp>
         <p:nvSpPr>
@@ -25677,6 +25865,10 @@
             <a:prstDash val="solid"/>
           </a:ln>
         </p:spPr>
+        <p:txBody>
+          <a:bodyPr/>
+          <a:p/>
+        </p:txBody>
       </p:sp>
       <p:sp>
         <p:nvSpPr>
@@ -25825,6 +26017,10 @@
             <a:prstDash val="solid"/>
           </a:ln>
         </p:spPr>
+        <p:txBody>
+          <a:bodyPr/>
+          <a:p/>
+        </p:txBody>
       </p:sp>
       <p:sp>
         <p:nvSpPr>
@@ -25973,6 +26169,10 @@
             <a:prstDash val="solid"/>
           </a:ln>
         </p:spPr>
+        <p:txBody>
+          <a:bodyPr/>
+          <a:p/>
+        </p:txBody>
       </p:sp>
       <p:sp>
         <p:nvSpPr>
@@ -26256,6 +26456,10 @@
             <a:prstDash val="solid"/>
           </a:ln>
         </p:spPr>
+        <p:txBody>
+          <a:bodyPr/>
+          <a:p/>
+        </p:txBody>
       </p:sp>
       <p:sp>
         <p:nvSpPr>
@@ -26490,6 +26694,10 @@
             <a:prstDash val="solid"/>
           </a:ln>
         </p:spPr>
+        <p:txBody>
+          <a:bodyPr/>
+          <a:p/>
+        </p:txBody>
       </p:sp>
       <p:sp>
         <p:nvSpPr>
@@ -26591,6 +26799,10 @@
             <a:prstDash val="solid"/>
           </a:ln>
         </p:spPr>
+        <p:txBody>
+          <a:bodyPr/>
+          <a:p/>
+        </p:txBody>
       </p:sp>
       <p:sp>
         <p:nvSpPr>
@@ -26696,6 +26908,10 @@
             <a:prstDash val="solid"/>
           </a:ln>
         </p:spPr>
+        <p:txBody>
+          <a:bodyPr/>
+          <a:p/>
+        </p:txBody>
       </p:sp>
       <p:sp>
         <p:nvSpPr>
@@ -26844,6 +27060,10 @@
             <a:prstDash val="solid"/>
           </a:ln>
         </p:spPr>
+        <p:txBody>
+          <a:bodyPr/>
+          <a:p/>
+        </p:txBody>
       </p:sp>
       <p:sp>
         <p:nvSpPr>
@@ -26992,6 +27212,10 @@
             <a:prstDash val="solid"/>
           </a:ln>
         </p:spPr>
+        <p:txBody>
+          <a:bodyPr/>
+          <a:p/>
+        </p:txBody>
       </p:sp>
       <p:sp>
         <p:nvSpPr>
@@ -27140,6 +27364,10 @@
             <a:prstDash val="solid"/>
           </a:ln>
         </p:spPr>
+        <p:txBody>
+          <a:bodyPr/>
+          <a:p/>
+        </p:txBody>
       </p:sp>
       <p:sp>
         <p:nvSpPr>
@@ -27288,6 +27516,10 @@
             <a:prstDash val="solid"/>
           </a:ln>
         </p:spPr>
+        <p:txBody>
+          <a:bodyPr/>
+          <a:p/>
+        </p:txBody>
       </p:sp>
       <p:sp>
         <p:nvSpPr>
@@ -27436,6 +27668,10 @@
             <a:prstDash val="solid"/>
           </a:ln>
         </p:spPr>
+        <p:txBody>
+          <a:bodyPr/>
+          <a:p/>
+        </p:txBody>
       </p:sp>
       <p:sp>
         <p:nvSpPr>
@@ -27719,6 +27955,10 @@
             <a:prstDash val="solid"/>
           </a:ln>
         </p:spPr>
+        <p:txBody>
+          <a:bodyPr/>
+          <a:p/>
+        </p:txBody>
       </p:sp>
       <p:sp>
         <p:nvSpPr>
@@ -27953,6 +28193,10 @@
             <a:prstDash val="solid"/>
           </a:ln>
         </p:spPr>
+        <p:txBody>
+          <a:bodyPr/>
+          <a:p/>
+        </p:txBody>
       </p:sp>
       <p:sp>
         <p:nvSpPr>
@@ -28054,6 +28298,10 @@
             <a:prstDash val="solid"/>
           </a:ln>
         </p:spPr>
+        <p:txBody>
+          <a:bodyPr/>
+          <a:p/>
+        </p:txBody>
       </p:sp>
       <p:sp>
         <p:nvSpPr>
@@ -28253,6 +28501,10 @@
             <a:prstDash val="solid"/>
           </a:ln>
         </p:spPr>
+        <p:txBody>
+          <a:bodyPr/>
+          <a:p/>
+        </p:txBody>
       </p:sp>
       <p:sp>
         <p:nvSpPr>
@@ -28487,6 +28739,10 @@
             <a:prstDash val="solid"/>
           </a:ln>
         </p:spPr>
+        <p:txBody>
+          <a:bodyPr/>
+          <a:p/>
+        </p:txBody>
       </p:sp>
       <p:sp>
         <p:nvSpPr>
@@ -28588,6 +28844,10 @@
             <a:prstDash val="solid"/>
           </a:ln>
         </p:spPr>
+        <p:txBody>
+          <a:bodyPr/>
+          <a:p/>
+        </p:txBody>
       </p:sp>
       <p:sp>
         <p:nvSpPr>
@@ -28787,6 +29047,10 @@
             <a:prstDash val="solid"/>
           </a:ln>
         </p:spPr>
+        <p:txBody>
+          <a:bodyPr/>
+          <a:p/>
+        </p:txBody>
       </p:sp>
       <p:sp>
         <p:nvSpPr>
@@ -29021,6 +29285,10 @@
             <a:prstDash val="solid"/>
           </a:ln>
         </p:spPr>
+        <p:txBody>
+          <a:bodyPr/>
+          <a:p/>
+        </p:txBody>
       </p:sp>
       <p:sp>
         <p:nvSpPr>
@@ -29122,6 +29390,10 @@
             <a:prstDash val="solid"/>
           </a:ln>
         </p:spPr>
+        <p:txBody>
+          <a:bodyPr/>
+          <a:p/>
+        </p:txBody>
       </p:sp>
       <p:sp>
         <p:nvSpPr>
@@ -30700,6 +30972,10 @@
             <a:prstDash val="solid"/>
           </a:ln>
         </p:spPr>
+        <p:txBody>
+          <a:bodyPr/>
+          <a:p/>
+        </p:txBody>
       </p:sp>
       <p:sp>
         <p:nvSpPr>
@@ -30854,6 +31130,10 @@
             <a:prstDash val="solid"/>
           </a:ln>
         </p:spPr>
+        <p:txBody>
+          <a:bodyPr/>
+          <a:p/>
+        </p:txBody>
       </p:sp>
       <p:sp>
         <p:nvSpPr>
@@ -30955,6 +31235,10 @@
             <a:prstDash val="solid"/>
           </a:ln>
         </p:spPr>
+        <p:txBody>
+          <a:bodyPr/>
+          <a:p/>
+        </p:txBody>
       </p:sp>
       <p:sp>
         <p:nvSpPr>
@@ -31165,6 +31449,10 @@
             <a:prstDash val="solid"/>
           </a:ln>
         </p:spPr>
+        <p:txBody>
+          <a:bodyPr/>
+          <a:p/>
+        </p:txBody>
       </p:sp>
       <p:sp>
         <p:nvSpPr>
@@ -31399,6 +31687,10 @@
             <a:prstDash val="solid"/>
           </a:ln>
         </p:spPr>
+        <p:txBody>
+          <a:bodyPr/>
+          <a:p/>
+        </p:txBody>
       </p:sp>
       <p:sp>
         <p:nvSpPr>
@@ -31500,6 +31792,10 @@
             <a:prstDash val="solid"/>
           </a:ln>
         </p:spPr>
+        <p:txBody>
+          <a:bodyPr/>
+          <a:p/>
+        </p:txBody>
       </p:sp>
       <p:sp>
         <p:nvSpPr>
@@ -31605,6 +31901,10 @@
             <a:prstDash val="solid"/>
           </a:ln>
         </p:spPr>
+        <p:txBody>
+          <a:bodyPr/>
+          <a:p/>
+        </p:txBody>
       </p:sp>
       <p:sp>
         <p:nvSpPr>
@@ -31710,6 +32010,10 @@
             <a:prstDash val="solid"/>
           </a:ln>
         </p:spPr>
+        <p:txBody>
+          <a:bodyPr/>
+          <a:p/>
+        </p:txBody>
       </p:sp>
       <p:sp>
         <p:nvSpPr>
@@ -31737,6 +32041,10 @@
             <a:prstDash val="solid"/>
           </a:ln>
         </p:spPr>
+        <p:txBody>
+          <a:bodyPr/>
+          <a:p/>
+        </p:txBody>
       </p:sp>
       <p:sp>
         <p:nvSpPr>
@@ -31842,6 +32150,10 @@
             <a:prstDash val="solid"/>
           </a:ln>
         </p:spPr>
+        <p:txBody>
+          <a:bodyPr/>
+          <a:p/>
+        </p:txBody>
       </p:sp>
       <p:sp>
         <p:nvSpPr>
@@ -31869,6 +32181,10 @@
             <a:prstDash val="solid"/>
           </a:ln>
         </p:spPr>
+        <p:txBody>
+          <a:bodyPr/>
+          <a:p/>
+        </p:txBody>
       </p:sp>
       <p:sp>
         <p:nvSpPr>
@@ -31974,6 +32290,10 @@
             <a:prstDash val="solid"/>
           </a:ln>
         </p:spPr>
+        <p:txBody>
+          <a:bodyPr/>
+          <a:p/>
+        </p:txBody>
       </p:sp>
       <p:sp>
         <p:nvSpPr>
@@ -32001,6 +32321,10 @@
             <a:prstDash val="solid"/>
           </a:ln>
         </p:spPr>
+        <p:txBody>
+          <a:bodyPr/>
+          <a:p/>
+        </p:txBody>
       </p:sp>
       <p:sp>
         <p:nvSpPr>
@@ -32106,6 +32430,10 @@
             <a:prstDash val="solid"/>
           </a:ln>
         </p:spPr>
+        <p:txBody>
+          <a:bodyPr/>
+          <a:p/>
+        </p:txBody>
       </p:sp>
       <p:sp>
         <p:nvSpPr>
@@ -32133,6 +32461,10 @@
             <a:prstDash val="solid"/>
           </a:ln>
         </p:spPr>
+        <p:txBody>
+          <a:bodyPr/>
+          <a:p/>
+        </p:txBody>
       </p:sp>
       <p:sp>
         <p:nvSpPr>
@@ -32238,6 +32570,10 @@
             <a:prstDash val="solid"/>
           </a:ln>
         </p:spPr>
+        <p:txBody>
+          <a:bodyPr/>
+          <a:p/>
+        </p:txBody>
       </p:sp>
       <p:sp>
         <p:nvSpPr>
@@ -32265,6 +32601,10 @@
             <a:prstDash val="solid"/>
           </a:ln>
         </p:spPr>
+        <p:txBody>
+          <a:bodyPr/>
+          <a:p/>
+        </p:txBody>
       </p:sp>
       <p:sp>
         <p:nvSpPr>
@@ -32370,6 +32710,10 @@
             <a:prstDash val="solid"/>
           </a:ln>
         </p:spPr>
+        <p:txBody>
+          <a:bodyPr/>
+          <a:p/>
+        </p:txBody>
       </p:sp>
       <p:sp>
         <p:nvSpPr>
@@ -32397,6 +32741,10 @@
             <a:prstDash val="solid"/>
           </a:ln>
         </p:spPr>
+        <p:txBody>
+          <a:bodyPr/>
+          <a:p/>
+        </p:txBody>
       </p:sp>
       <p:sp>
         <p:nvSpPr>
@@ -32502,6 +32850,10 @@
             <a:prstDash val="solid"/>
           </a:ln>
         </p:spPr>
+        <p:txBody>
+          <a:bodyPr/>
+          <a:p/>
+        </p:txBody>
       </p:sp>
       <p:sp>
         <p:nvSpPr>
@@ -32529,6 +32881,10 @@
             <a:prstDash val="solid"/>
           </a:ln>
         </p:spPr>
+        <p:txBody>
+          <a:bodyPr/>
+          <a:p/>
+        </p:txBody>
       </p:sp>
       <p:sp>
         <p:nvSpPr>
@@ -32702,6 +33058,10 @@
             <a:prstDash val="solid"/>
           </a:ln>
         </p:spPr>
+        <p:txBody>
+          <a:bodyPr/>
+          <a:p/>
+        </p:txBody>
       </p:sp>
       <p:sp>
         <p:nvSpPr>
@@ -32936,6 +33296,10 @@
             <a:prstDash val="solid"/>
           </a:ln>
         </p:spPr>
+        <p:txBody>
+          <a:bodyPr/>
+          <a:p/>
+        </p:txBody>
       </p:sp>
       <p:sp>
         <p:nvSpPr>
@@ -33037,6 +33401,10 @@
             <a:prstDash val="solid"/>
           </a:ln>
         </p:spPr>
+        <p:txBody>
+          <a:bodyPr/>
+          <a:p/>
+        </p:txBody>
       </p:sp>
       <p:sp>
         <p:nvSpPr>
@@ -36101,6 +36469,10 @@
             <a:prstDash val="solid"/>
           </a:ln>
         </p:spPr>
+        <p:txBody>
+          <a:bodyPr/>
+          <a:p/>
+        </p:txBody>
       </p:sp>
       <p:sp>
         <p:nvSpPr>
@@ -36335,6 +36707,10 @@
             <a:prstDash val="solid"/>
           </a:ln>
         </p:spPr>
+        <p:txBody>
+          <a:bodyPr/>
+          <a:p/>
+        </p:txBody>
       </p:sp>
       <p:sp>
         <p:nvSpPr>
@@ -36436,6 +36812,10 @@
             <a:prstDash val="solid"/>
           </a:ln>
         </p:spPr>
+        <p:txBody>
+          <a:bodyPr/>
+          <a:p/>
+        </p:txBody>
       </p:sp>
       <p:sp>
         <p:nvSpPr>
@@ -39023,6 +39403,10 @@
             <a:prstDash val="solid"/>
           </a:ln>
         </p:spPr>
+        <p:txBody>
+          <a:bodyPr/>
+          <a:p/>
+        </p:txBody>
       </p:sp>
       <p:sp>
         <p:nvSpPr>
@@ -39257,6 +39641,10 @@
             <a:prstDash val="solid"/>
           </a:ln>
         </p:spPr>
+        <p:txBody>
+          <a:bodyPr/>
+          <a:p/>
+        </p:txBody>
       </p:sp>
       <p:sp>
         <p:nvSpPr>
@@ -39358,6 +39746,10 @@
             <a:prstDash val="solid"/>
           </a:ln>
         </p:spPr>
+        <p:txBody>
+          <a:bodyPr/>
+          <a:p/>
+        </p:txBody>
       </p:sp>
       <p:sp>
         <p:nvSpPr>
@@ -39463,6 +39855,10 @@
             <a:prstDash val="solid"/>
           </a:ln>
         </p:spPr>
+        <p:txBody>
+          <a:bodyPr/>
+          <a:p/>
+        </p:txBody>
       </p:sp>
       <p:sp>
         <p:nvSpPr>
@@ -39611,6 +40007,10 @@
             <a:prstDash val="solid"/>
           </a:ln>
         </p:spPr>
+        <p:txBody>
+          <a:bodyPr/>
+          <a:p/>
+        </p:txBody>
       </p:sp>
       <p:sp>
         <p:nvSpPr>
@@ -39759,6 +40159,10 @@
             <a:prstDash val="solid"/>
           </a:ln>
         </p:spPr>
+        <p:txBody>
+          <a:bodyPr/>
+          <a:p/>
+        </p:txBody>
       </p:sp>
       <p:sp>
         <p:nvSpPr>
@@ -39907,6 +40311,10 @@
             <a:prstDash val="solid"/>
           </a:ln>
         </p:spPr>
+        <p:txBody>
+          <a:bodyPr/>
+          <a:p/>
+        </p:txBody>
       </p:sp>
       <p:sp>
         <p:nvSpPr>
@@ -40055,6 +40463,10 @@
             <a:prstDash val="solid"/>
           </a:ln>
         </p:spPr>
+        <p:txBody>
+          <a:bodyPr/>
+          <a:p/>
+        </p:txBody>
       </p:sp>
       <p:sp>
         <p:nvSpPr>
@@ -40258,6 +40670,10 @@
             <a:prstDash val="solid"/>
           </a:ln>
         </p:spPr>
+        <p:txBody>
+          <a:bodyPr/>
+          <a:p/>
+        </p:txBody>
       </p:sp>
       <p:sp>
         <p:nvSpPr>
@@ -40412,6 +40828,10 @@
             <a:prstDash val="solid"/>
           </a:ln>
         </p:spPr>
+        <p:txBody>
+          <a:bodyPr/>
+          <a:p/>
+        </p:txBody>
       </p:sp>
       <p:sp>
         <p:nvSpPr>
@@ -40513,6 +40933,10 @@
             <a:prstDash val="solid"/>
           </a:ln>
         </p:spPr>
+        <p:txBody>
+          <a:bodyPr/>
+          <a:p/>
+        </p:txBody>
       </p:sp>
       <p:sp>
         <p:nvSpPr>
@@ -40618,6 +41042,10 @@
             <a:prstDash val="solid"/>
           </a:ln>
         </p:spPr>
+        <p:txBody>
+          <a:bodyPr/>
+          <a:p/>
+        </p:txBody>
       </p:sp>
       <p:sp>
         <p:nvSpPr>
@@ -40766,6 +41194,10 @@
             <a:prstDash val="solid"/>
           </a:ln>
         </p:spPr>
+        <p:txBody>
+          <a:bodyPr/>
+          <a:p/>
+        </p:txBody>
       </p:sp>
       <p:sp>
         <p:nvSpPr>
@@ -40914,6 +41346,10 @@
             <a:prstDash val="solid"/>
           </a:ln>
         </p:spPr>
+        <p:txBody>
+          <a:bodyPr/>
+          <a:p/>
+        </p:txBody>
       </p:sp>
       <p:sp>
         <p:nvSpPr>
@@ -41183,6 +41619,10 @@
             <a:prstDash val="solid"/>
           </a:ln>
         </p:spPr>
+        <p:txBody>
+          <a:bodyPr/>
+          <a:p/>
+        </p:txBody>
       </p:sp>
       <p:sp>
         <p:nvSpPr>
@@ -41417,6 +41857,10 @@
             <a:prstDash val="solid"/>
           </a:ln>
         </p:spPr>
+        <p:txBody>
+          <a:bodyPr/>
+          <a:p/>
+        </p:txBody>
       </p:sp>
       <p:sp>
         <p:nvSpPr>
@@ -41518,6 +41962,10 @@
             <a:prstDash val="solid"/>
           </a:ln>
         </p:spPr>
+        <p:txBody>
+          <a:bodyPr/>
+          <a:p/>
+        </p:txBody>
       </p:sp>
       <p:sp>
         <p:nvSpPr>
@@ -41744,6 +42192,10 @@
             <a:prstDash val="solid"/>
           </a:ln>
         </p:spPr>
+        <p:txBody>
+          <a:bodyPr/>
+          <a:p/>
+        </p:txBody>
       </p:sp>
       <p:sp>
         <p:nvSpPr>
@@ -41978,6 +42430,10 @@
             <a:prstDash val="solid"/>
           </a:ln>
         </p:spPr>
+        <p:txBody>
+          <a:bodyPr/>
+          <a:p/>
+        </p:txBody>
       </p:sp>
       <p:sp>
         <p:nvSpPr>
@@ -42079,6 +42535,10 @@
             <a:prstDash val="solid"/>
           </a:ln>
         </p:spPr>
+        <p:txBody>
+          <a:bodyPr/>
+          <a:p/>
+        </p:txBody>
       </p:sp>
       <p:sp>
         <p:nvSpPr>
@@ -42305,6 +42765,10 @@
             <a:prstDash val="solid"/>
           </a:ln>
         </p:spPr>
+        <p:txBody>
+          <a:bodyPr/>
+          <a:p/>
+        </p:txBody>
       </p:sp>
       <p:sp>
         <p:nvSpPr>
